--- a/AplicacionesDistribuidas/2026 PPA/Material de clases/DistApp_Semana1_Diapositivas_1.pptx
+++ b/AplicacionesDistribuidas/2026 PPA/Material de clases/DistApp_Semana1_Diapositivas_1.pptx
@@ -2033,7 +2033,7 @@
                 <a:ea typeface="Calibri" pitchFamily="34" charset="-122"/>
                 <a:cs typeface="Calibri" pitchFamily="34" charset="-120"/>
               </a:rPr>
-              <a:t>Período Académico: Regular 2025-2026 SPA  ·  Carrera de Ingeniería de Software — 7º Semestre</a:t>
+              <a:t>Período Académico: Regular 2026-2027 SPA  ·  Carrera de Ingeniería de Software — 7º Semestre</a:t>
             </a:r>
             <a:endParaRPr lang="en-US" sz="950" dirty="0"/>
           </a:p>
